--- a/Yuhe Lin/forwarding and headers.pptx
+++ b/Yuhe Lin/forwarding and headers.pptx
@@ -263,7 +263,7 @@
           <a:p>
             <a:fld id="{C3BCEF51-89DD-457C-A7D0-C7891E099EE5}" type="datetimeFigureOut">
               <a:rPr lang="zh-CN" altLang="en-US" smtClean="0"/>
-              <a:t>2026/7/10</a:t>
+              <a:t>2026/7/11</a:t>
             </a:fld>
             <a:endParaRPr lang="zh-CN" altLang="en-US"/>
           </a:p>
@@ -461,7 +461,7 @@
           <a:p>
             <a:fld id="{C3BCEF51-89DD-457C-A7D0-C7891E099EE5}" type="datetimeFigureOut">
               <a:rPr lang="zh-CN" altLang="en-US" smtClean="0"/>
-              <a:t>2026/7/10</a:t>
+              <a:t>2026/7/11</a:t>
             </a:fld>
             <a:endParaRPr lang="zh-CN" altLang="en-US"/>
           </a:p>
@@ -669,7 +669,7 @@
           <a:p>
             <a:fld id="{C3BCEF51-89DD-457C-A7D0-C7891E099EE5}" type="datetimeFigureOut">
               <a:rPr lang="zh-CN" altLang="en-US" smtClean="0"/>
-              <a:t>2026/7/10</a:t>
+              <a:t>2026/7/11</a:t>
             </a:fld>
             <a:endParaRPr lang="zh-CN" altLang="en-US"/>
           </a:p>
@@ -867,7 +867,7 @@
           <a:p>
             <a:fld id="{C3BCEF51-89DD-457C-A7D0-C7891E099EE5}" type="datetimeFigureOut">
               <a:rPr lang="zh-CN" altLang="en-US" smtClean="0"/>
-              <a:t>2026/7/10</a:t>
+              <a:t>2026/7/11</a:t>
             </a:fld>
             <a:endParaRPr lang="zh-CN" altLang="en-US"/>
           </a:p>
@@ -1142,7 +1142,7 @@
           <a:p>
             <a:fld id="{C3BCEF51-89DD-457C-A7D0-C7891E099EE5}" type="datetimeFigureOut">
               <a:rPr lang="zh-CN" altLang="en-US" smtClean="0"/>
-              <a:t>2026/7/10</a:t>
+              <a:t>2026/7/11</a:t>
             </a:fld>
             <a:endParaRPr lang="zh-CN" altLang="en-US"/>
           </a:p>
@@ -1407,7 +1407,7 @@
           <a:p>
             <a:fld id="{C3BCEF51-89DD-457C-A7D0-C7891E099EE5}" type="datetimeFigureOut">
               <a:rPr lang="zh-CN" altLang="en-US" smtClean="0"/>
-              <a:t>2026/7/10</a:t>
+              <a:t>2026/7/11</a:t>
             </a:fld>
             <a:endParaRPr lang="zh-CN" altLang="en-US"/>
           </a:p>
@@ -1819,7 +1819,7 @@
           <a:p>
             <a:fld id="{C3BCEF51-89DD-457C-A7D0-C7891E099EE5}" type="datetimeFigureOut">
               <a:rPr lang="zh-CN" altLang="en-US" smtClean="0"/>
-              <a:t>2026/7/10</a:t>
+              <a:t>2026/7/11</a:t>
             </a:fld>
             <a:endParaRPr lang="zh-CN" altLang="en-US"/>
           </a:p>
@@ -1960,7 +1960,7 @@
           <a:p>
             <a:fld id="{C3BCEF51-89DD-457C-A7D0-C7891E099EE5}" type="datetimeFigureOut">
               <a:rPr lang="zh-CN" altLang="en-US" smtClean="0"/>
-              <a:t>2026/7/10</a:t>
+              <a:t>2026/7/11</a:t>
             </a:fld>
             <a:endParaRPr lang="zh-CN" altLang="en-US"/>
           </a:p>
@@ -2073,7 +2073,7 @@
           <a:p>
             <a:fld id="{C3BCEF51-89DD-457C-A7D0-C7891E099EE5}" type="datetimeFigureOut">
               <a:rPr lang="zh-CN" altLang="en-US" smtClean="0"/>
-              <a:t>2026/7/10</a:t>
+              <a:t>2026/7/11</a:t>
             </a:fld>
             <a:endParaRPr lang="zh-CN" altLang="en-US"/>
           </a:p>
@@ -2384,7 +2384,7 @@
           <a:p>
             <a:fld id="{C3BCEF51-89DD-457C-A7D0-C7891E099EE5}" type="datetimeFigureOut">
               <a:rPr lang="zh-CN" altLang="en-US" smtClean="0"/>
-              <a:t>2026/7/10</a:t>
+              <a:t>2026/7/11</a:t>
             </a:fld>
             <a:endParaRPr lang="zh-CN" altLang="en-US"/>
           </a:p>
@@ -2672,7 +2672,7 @@
           <a:p>
             <a:fld id="{C3BCEF51-89DD-457C-A7D0-C7891E099EE5}" type="datetimeFigureOut">
               <a:rPr lang="zh-CN" altLang="en-US" smtClean="0"/>
-              <a:t>2026/7/10</a:t>
+              <a:t>2026/7/11</a:t>
             </a:fld>
             <a:endParaRPr lang="zh-CN" altLang="en-US"/>
           </a:p>
@@ -2913,7 +2913,7 @@
           <a:p>
             <a:fld id="{C3BCEF51-89DD-457C-A7D0-C7891E099EE5}" type="datetimeFigureOut">
               <a:rPr lang="zh-CN" altLang="en-US" smtClean="0"/>
-              <a:t>2026/7/10</a:t>
+              <a:t>2026/7/11</a:t>
             </a:fld>
             <a:endParaRPr lang="zh-CN" altLang="en-US"/>
           </a:p>
@@ -4744,7 +4744,7 @@
         <p:spPr>
           <a:xfrm>
             <a:off x="5971180" y="2013358"/>
-            <a:ext cx="4557003" cy="2308324"/>
+            <a:ext cx="4557003" cy="2554545"/>
           </a:xfrm>
           <a:prstGeom prst="rect">
             <a:avLst/>
@@ -4758,8 +4758,8 @@
           <a:lstStyle/>
           <a:p>
             <a:r>
-              <a:rPr lang="en-US" altLang="zh-CN" dirty="0"/>
-              <a:t>Our work:</a:t>
+              <a:rPr lang="en-US" altLang="zh-CN" sz="2000" dirty="0"/>
+              <a:t>Our work (source routing):</a:t>
             </a:r>
           </a:p>
           <a:p>
@@ -4768,7 +4768,7 @@
               <a:buChar char="•"/>
             </a:pPr>
             <a:r>
-              <a:rPr lang="en-US" altLang="zh-CN" dirty="0"/>
+              <a:rPr lang="en-US" altLang="zh-CN" sz="2000" dirty="0"/>
               <a:t>OpenFlow 1.3</a:t>
             </a:r>
           </a:p>
@@ -4778,19 +4778,19 @@
               <a:buChar char="•"/>
             </a:pPr>
             <a:r>
-              <a:rPr lang="en-US" altLang="zh-CN" dirty="0"/>
+              <a:rPr lang="en-US" altLang="zh-CN" sz="2000" dirty="0"/>
               <a:t>Repurpose </a:t>
             </a:r>
             <a:r>
-              <a:rPr lang="en-US" altLang="zh-CN" dirty="0" err="1"/>
+              <a:rPr lang="en-US" altLang="zh-CN" sz="2000" dirty="0" err="1"/>
               <a:t>vlan</a:t>
             </a:r>
             <a:r>
-              <a:rPr lang="en-US" altLang="zh-CN" dirty="0"/>
+              <a:rPr lang="en-US" altLang="zh-CN" sz="2000" dirty="0"/>
               <a:t> tag in </a:t>
             </a:r>
             <a:r>
-              <a:rPr lang="en-US" altLang="zh-CN" sz="1800" kern="1200" dirty="0">
+              <a:rPr lang="en-US" altLang="zh-CN" sz="2000" kern="1200" dirty="0">
                 <a:solidFill>
                   <a:srgbClr val="000000"/>
                 </a:solidFill>
@@ -4808,14 +4808,14 @@
               <a:buChar char="•"/>
             </a:pPr>
             <a:r>
-              <a:rPr lang="en-US" altLang="zh-CN" dirty="0">
+              <a:rPr lang="en-US" altLang="zh-CN" sz="2000" dirty="0">
                 <a:solidFill>
                   <a:srgbClr val="000000"/>
                 </a:solidFill>
                 <a:latin typeface="等线" panose="02010600030101010101" pitchFamily="2" charset="-122"/>
                 <a:ea typeface="等线" panose="02010600030101010101" pitchFamily="2" charset="-122"/>
               </a:rPr>
-              <a:t>Hosts know the path</a:t>
+              <a:t>Hosts know the whole path</a:t>
             </a:r>
           </a:p>
           <a:p>
@@ -4824,7 +4824,7 @@
               <a:buChar char="•"/>
             </a:pPr>
             <a:r>
-              <a:rPr lang="en-US" altLang="zh-CN" dirty="0">
+              <a:rPr lang="en-US" altLang="zh-CN" sz="2000" dirty="0">
                 <a:solidFill>
                   <a:srgbClr val="000000"/>
                 </a:solidFill>
@@ -4840,16 +4840,16 @@
               <a:buChar char="•"/>
             </a:pPr>
             <a:r>
-              <a:rPr lang="en-US" altLang="zh-CN" dirty="0">
+              <a:rPr lang="en-US" altLang="zh-CN" sz="2000" dirty="0">
                 <a:solidFill>
                   <a:srgbClr val="000000"/>
                 </a:solidFill>
                 <a:latin typeface="等线" panose="02010600030101010101" pitchFamily="2" charset="-122"/>
                 <a:ea typeface="等线" panose="02010600030101010101" pitchFamily="2" charset="-122"/>
               </a:rPr>
-              <a:t>Switches forward pkts following path in pkt headers</a:t>
-            </a:r>
-            <a:endParaRPr lang="zh-CN" altLang="en-US" dirty="0"/>
+              <a:t>Switches forward pkts following path in their headers</a:t>
+            </a:r>
+            <a:endParaRPr lang="zh-CN" altLang="en-US" sz="2000" dirty="0"/>
           </a:p>
         </p:txBody>
       </p:sp>
@@ -4868,7 +4868,7 @@
         <p:spPr>
           <a:xfrm>
             <a:off x="1113762" y="2013358"/>
-            <a:ext cx="3886077" cy="1200329"/>
+            <a:ext cx="3886077" cy="1323439"/>
           </a:xfrm>
           <a:prstGeom prst="rect">
             <a:avLst/>
@@ -4882,7 +4882,7 @@
           <a:lstStyle/>
           <a:p>
             <a:r>
-              <a:rPr lang="en-US" altLang="zh-CN" dirty="0"/>
+              <a:rPr lang="en-US" altLang="zh-CN" sz="2000" dirty="0"/>
               <a:t>Traditional forwarding:</a:t>
             </a:r>
           </a:p>
@@ -4892,7 +4892,7 @@
               <a:buChar char="•"/>
             </a:pPr>
             <a:r>
-              <a:rPr lang="en-US" altLang="zh-CN" dirty="0"/>
+              <a:rPr lang="en-US" altLang="zh-CN" sz="2000" dirty="0"/>
               <a:t>Distributed routing decision</a:t>
             </a:r>
           </a:p>
@@ -4902,10 +4902,10 @@
               <a:buChar char="•"/>
             </a:pPr>
             <a:r>
-              <a:rPr lang="en-US" altLang="zh-CN" dirty="0"/>
+              <a:rPr lang="en-US" altLang="zh-CN" sz="2000" dirty="0"/>
               <a:t>Switches forward pkts by looking up table (IP - port)</a:t>
             </a:r>
-            <a:endParaRPr lang="zh-CN" altLang="en-US" dirty="0"/>
+            <a:endParaRPr lang="zh-CN" altLang="en-US" sz="2000" dirty="0"/>
           </a:p>
         </p:txBody>
       </p:sp>

--- a/Yuhe Lin/forwarding and headers.pptx
+++ b/Yuhe Lin/forwarding and headers.pptx
@@ -10,6 +10,7 @@
     <p:sldId id="259" r:id="rId4"/>
     <p:sldId id="264" r:id="rId5"/>
     <p:sldId id="257" r:id="rId6"/>
+    <p:sldId id="266" r:id="rId7"/>
   </p:sldIdLst>
   <p:sldSz cx="12192000" cy="6858000"/>
   <p:notesSz cx="6858000" cy="9144000"/>
@@ -263,7 +264,7 @@
           <a:p>
             <a:fld id="{C3BCEF51-89DD-457C-A7D0-C7891E099EE5}" type="datetimeFigureOut">
               <a:rPr lang="zh-CN" altLang="en-US" smtClean="0"/>
-              <a:t>2026/7/11</a:t>
+              <a:t>2026/7/14</a:t>
             </a:fld>
             <a:endParaRPr lang="zh-CN" altLang="en-US"/>
           </a:p>
@@ -461,7 +462,7 @@
           <a:p>
             <a:fld id="{C3BCEF51-89DD-457C-A7D0-C7891E099EE5}" type="datetimeFigureOut">
               <a:rPr lang="zh-CN" altLang="en-US" smtClean="0"/>
-              <a:t>2026/7/11</a:t>
+              <a:t>2026/7/14</a:t>
             </a:fld>
             <a:endParaRPr lang="zh-CN" altLang="en-US"/>
           </a:p>
@@ -669,7 +670,7 @@
           <a:p>
             <a:fld id="{C3BCEF51-89DD-457C-A7D0-C7891E099EE5}" type="datetimeFigureOut">
               <a:rPr lang="zh-CN" altLang="en-US" smtClean="0"/>
-              <a:t>2026/7/11</a:t>
+              <a:t>2026/7/14</a:t>
             </a:fld>
             <a:endParaRPr lang="zh-CN" altLang="en-US"/>
           </a:p>
@@ -867,7 +868,7 @@
           <a:p>
             <a:fld id="{C3BCEF51-89DD-457C-A7D0-C7891E099EE5}" type="datetimeFigureOut">
               <a:rPr lang="zh-CN" altLang="en-US" smtClean="0"/>
-              <a:t>2026/7/11</a:t>
+              <a:t>2026/7/14</a:t>
             </a:fld>
             <a:endParaRPr lang="zh-CN" altLang="en-US"/>
           </a:p>
@@ -1142,7 +1143,7 @@
           <a:p>
             <a:fld id="{C3BCEF51-89DD-457C-A7D0-C7891E099EE5}" type="datetimeFigureOut">
               <a:rPr lang="zh-CN" altLang="en-US" smtClean="0"/>
-              <a:t>2026/7/11</a:t>
+              <a:t>2026/7/14</a:t>
             </a:fld>
             <a:endParaRPr lang="zh-CN" altLang="en-US"/>
           </a:p>
@@ -1407,7 +1408,7 @@
           <a:p>
             <a:fld id="{C3BCEF51-89DD-457C-A7D0-C7891E099EE5}" type="datetimeFigureOut">
               <a:rPr lang="zh-CN" altLang="en-US" smtClean="0"/>
-              <a:t>2026/7/11</a:t>
+              <a:t>2026/7/14</a:t>
             </a:fld>
             <a:endParaRPr lang="zh-CN" altLang="en-US"/>
           </a:p>
@@ -1819,7 +1820,7 @@
           <a:p>
             <a:fld id="{C3BCEF51-89DD-457C-A7D0-C7891E099EE5}" type="datetimeFigureOut">
               <a:rPr lang="zh-CN" altLang="en-US" smtClean="0"/>
-              <a:t>2026/7/11</a:t>
+              <a:t>2026/7/14</a:t>
             </a:fld>
             <a:endParaRPr lang="zh-CN" altLang="en-US"/>
           </a:p>
@@ -1960,7 +1961,7 @@
           <a:p>
             <a:fld id="{C3BCEF51-89DD-457C-A7D0-C7891E099EE5}" type="datetimeFigureOut">
               <a:rPr lang="zh-CN" altLang="en-US" smtClean="0"/>
-              <a:t>2026/7/11</a:t>
+              <a:t>2026/7/14</a:t>
             </a:fld>
             <a:endParaRPr lang="zh-CN" altLang="en-US"/>
           </a:p>
@@ -2073,7 +2074,7 @@
           <a:p>
             <a:fld id="{C3BCEF51-89DD-457C-A7D0-C7891E099EE5}" type="datetimeFigureOut">
               <a:rPr lang="zh-CN" altLang="en-US" smtClean="0"/>
-              <a:t>2026/7/11</a:t>
+              <a:t>2026/7/14</a:t>
             </a:fld>
             <a:endParaRPr lang="zh-CN" altLang="en-US"/>
           </a:p>
@@ -2384,7 +2385,7 @@
           <a:p>
             <a:fld id="{C3BCEF51-89DD-457C-A7D0-C7891E099EE5}" type="datetimeFigureOut">
               <a:rPr lang="zh-CN" altLang="en-US" smtClean="0"/>
-              <a:t>2026/7/11</a:t>
+              <a:t>2026/7/14</a:t>
             </a:fld>
             <a:endParaRPr lang="zh-CN" altLang="en-US"/>
           </a:p>
@@ -2672,7 +2673,7 @@
           <a:p>
             <a:fld id="{C3BCEF51-89DD-457C-A7D0-C7891E099EE5}" type="datetimeFigureOut">
               <a:rPr lang="zh-CN" altLang="en-US" smtClean="0"/>
-              <a:t>2026/7/11</a:t>
+              <a:t>2026/7/14</a:t>
             </a:fld>
             <a:endParaRPr lang="zh-CN" altLang="en-US"/>
           </a:p>
@@ -2913,7 +2914,7 @@
           <a:p>
             <a:fld id="{C3BCEF51-89DD-457C-A7D0-C7891E099EE5}" type="datetimeFigureOut">
               <a:rPr lang="zh-CN" altLang="en-US" smtClean="0"/>
-              <a:t>2026/7/11</a:t>
+              <a:t>2026/7/14</a:t>
             </a:fld>
             <a:endParaRPr lang="zh-CN" altLang="en-US"/>
           </a:p>
@@ -8134,6 +8135,132 @@
 </p:sld>
 </file>
 
+<file path=ppt/slides/slide6.xml><?xml version="1.0" encoding="utf-8"?>
+<p:sld xmlns:a="http://schemas.openxmlformats.org/drawingml/2006/main" xmlns:r="http://schemas.openxmlformats.org/officeDocument/2006/relationships" xmlns:p="http://schemas.openxmlformats.org/presentationml/2006/main">
+  <p:cSld>
+    <p:spTree>
+      <p:nvGrpSpPr>
+        <p:cNvPr id="1" name=""/>
+        <p:cNvGrpSpPr/>
+        <p:nvPr/>
+      </p:nvGrpSpPr>
+      <p:grpSpPr>
+        <a:xfrm>
+          <a:off x="0" y="0"/>
+          <a:ext cx="0" cy="0"/>
+          <a:chOff x="0" y="0"/>
+          <a:chExt cx="0" cy="0"/>
+        </a:xfrm>
+      </p:grpSpPr>
+      <p:sp>
+        <p:nvSpPr>
+          <p:cNvPr id="4" name="标题 1">
+            <a:extLst>
+              <a:ext uri="{FF2B5EF4-FFF2-40B4-BE49-F238E27FC236}">
+                <a16:creationId xmlns:a16="http://schemas.microsoft.com/office/drawing/2014/main" id="{EBAEFE27-573C-4FAE-8D59-FAB4D36E9E2E}"/>
+              </a:ext>
+            </a:extLst>
+          </p:cNvPr>
+          <p:cNvSpPr>
+            <a:spLocks noGrp="1"/>
+          </p:cNvSpPr>
+          <p:nvPr>
+            <p:ph type="title"/>
+          </p:nvPr>
+        </p:nvSpPr>
+        <p:spPr>
+          <a:xfrm>
+            <a:off x="838200" y="365125"/>
+            <a:ext cx="10515600" cy="1325563"/>
+          </a:xfrm>
+        </p:spPr>
+        <p:txBody>
+          <a:bodyPr>
+            <a:normAutofit/>
+          </a:bodyPr>
+          <a:lstStyle/>
+          <a:p>
+            <a:r>
+              <a:rPr lang="en-US" altLang="zh-CN" sz="4000" dirty="0"/>
+              <a:t>AI Utilization</a:t>
+            </a:r>
+            <a:endParaRPr lang="zh-CN" altLang="en-US" sz="4000" dirty="0"/>
+          </a:p>
+        </p:txBody>
+      </p:sp>
+      <p:sp>
+        <p:nvSpPr>
+          <p:cNvPr id="5" name="文本框 4">
+            <a:extLst>
+              <a:ext uri="{FF2B5EF4-FFF2-40B4-BE49-F238E27FC236}">
+                <a16:creationId xmlns:a16="http://schemas.microsoft.com/office/drawing/2014/main" id="{BA453D84-B45C-4774-9F67-85474829C974}"/>
+              </a:ext>
+            </a:extLst>
+          </p:cNvPr>
+          <p:cNvSpPr txBox="1"/>
+          <p:nvPr/>
+        </p:nvSpPr>
+        <p:spPr>
+          <a:xfrm>
+            <a:off x="1113762" y="2013358"/>
+            <a:ext cx="7065504" cy="1015663"/>
+          </a:xfrm>
+          <a:prstGeom prst="rect">
+            <a:avLst/>
+          </a:prstGeom>
+          <a:noFill/>
+        </p:spPr>
+        <p:txBody>
+          <a:bodyPr wrap="square" rtlCol="0">
+            <a:spAutoFit/>
+          </a:bodyPr>
+          <a:lstStyle/>
+          <a:p>
+            <a:pPr marL="285750" indent="-285750">
+              <a:buFont typeface="Arial" panose="020B0604020202020204" pitchFamily="34" charset="0"/>
+              <a:buChar char="•"/>
+            </a:pPr>
+            <a:r>
+              <a:rPr lang="en-US" altLang="zh-CN" sz="2000" dirty="0"/>
+              <a:t>Generate code template: Claude, Gemini</a:t>
+            </a:r>
+          </a:p>
+          <a:p>
+            <a:pPr marL="285750" indent="-285750">
+              <a:buFont typeface="Arial" panose="020B0604020202020204" pitchFamily="34" charset="0"/>
+              <a:buChar char="•"/>
+            </a:pPr>
+            <a:r>
+              <a:rPr lang="en-US" altLang="zh-CN" sz="2000" dirty="0"/>
+              <a:t>Code testing and debugging: Claude, Gemini</a:t>
+            </a:r>
+          </a:p>
+          <a:p>
+            <a:pPr marL="285750" indent="-285750">
+              <a:buFont typeface="Arial" panose="020B0604020202020204" pitchFamily="34" charset="0"/>
+              <a:buChar char="•"/>
+            </a:pPr>
+            <a:r>
+              <a:rPr lang="en-US" altLang="zh-CN" sz="2000" dirty="0"/>
+              <a:t>GUI Generation and Connection: Claude</a:t>
+            </a:r>
+            <a:endParaRPr lang="zh-CN" altLang="en-US" sz="2000" dirty="0"/>
+          </a:p>
+        </p:txBody>
+      </p:sp>
+    </p:spTree>
+    <p:extLst>
+      <p:ext uri="{BB962C8B-B14F-4D97-AF65-F5344CB8AC3E}">
+        <p14:creationId xmlns:p14="http://schemas.microsoft.com/office/powerpoint/2010/main" val="1020662615"/>
+      </p:ext>
+    </p:extLst>
+  </p:cSld>
+  <p:clrMapOvr>
+    <a:masterClrMapping/>
+  </p:clrMapOvr>
+</p:sld>
+</file>
+
 <file path=ppt/theme/theme1.xml><?xml version="1.0" encoding="utf-8"?>
 <a:theme xmlns:a="http://schemas.openxmlformats.org/drawingml/2006/main" name="Office 主题​​">
   <a:themeElements>

--- a/Yuhe Lin/forwarding and headers.pptx
+++ b/Yuhe Lin/forwarding and headers.pptx
@@ -4745,7 +4745,7 @@
         <p:spPr>
           <a:xfrm>
             <a:off x="5971180" y="2013358"/>
-            <a:ext cx="4557003" cy="2554545"/>
+            <a:ext cx="4557003" cy="3170099"/>
           </a:xfrm>
           <a:prstGeom prst="rect">
             <a:avLst/>
@@ -4769,8 +4769,14 @@
               <a:buChar char="•"/>
             </a:pPr>
             <a:r>
-              <a:rPr lang="en-US" altLang="zh-CN" sz="2000" dirty="0"/>
-              <a:t>OpenFlow 1.3</a:t>
+              <a:rPr lang="en-US" altLang="zh-CN" sz="2000" dirty="0">
+                <a:solidFill>
+                  <a:srgbClr val="000000"/>
+                </a:solidFill>
+                <a:latin typeface="等线" panose="02010600030101010101" pitchFamily="2" charset="-122"/>
+                <a:ea typeface="等线" panose="02010600030101010101" pitchFamily="2" charset="-122"/>
+              </a:rPr>
+              <a:t>Hosts know the whole path</a:t>
             </a:r>
           </a:p>
           <a:p>
@@ -4779,28 +4785,14 @@
               <a:buChar char="•"/>
             </a:pPr>
             <a:r>
-              <a:rPr lang="en-US" altLang="zh-CN" sz="2000" dirty="0"/>
-              <a:t>Repurpose </a:t>
-            </a:r>
-            <a:r>
-              <a:rPr lang="en-US" altLang="zh-CN" sz="2000" dirty="0" err="1"/>
-              <a:t>vlan</a:t>
-            </a:r>
-            <a:r>
-              <a:rPr lang="en-US" altLang="zh-CN" sz="2000" dirty="0"/>
-              <a:t> tag in </a:t>
-            </a:r>
-            <a:r>
-              <a:rPr lang="en-US" altLang="zh-CN" sz="2000" kern="1200" dirty="0">
+              <a:rPr lang="en-US" altLang="zh-CN" sz="2000" dirty="0">
                 <a:solidFill>
                   <a:srgbClr val="000000"/>
                 </a:solidFill>
-                <a:effectLst/>
                 <a:latin typeface="等线" panose="02010600030101010101" pitchFamily="2" charset="-122"/>
                 <a:ea typeface="等线" panose="02010600030101010101" pitchFamily="2" charset="-122"/>
-                <a:cs typeface="+mn-cs"/>
-              </a:rPr>
-              <a:t>802.1Q headers to store path </a:t>
+              </a:rPr>
+              <a:t>Hosts build path in pkt headers</a:t>
             </a:r>
           </a:p>
           <a:p>
@@ -4816,7 +4808,7 @@
                 <a:latin typeface="等线" panose="02010600030101010101" pitchFamily="2" charset="-122"/>
                 <a:ea typeface="等线" panose="02010600030101010101" pitchFamily="2" charset="-122"/>
               </a:rPr>
-              <a:t>Hosts know the whole path</a:t>
+              <a:t>Switches forward pkts following path in their headers</a:t>
             </a:r>
           </a:p>
           <a:p>
@@ -4824,16 +4816,13 @@
               <a:buFont typeface="Arial" panose="020B0604020202020204" pitchFamily="34" charset="0"/>
               <a:buChar char="•"/>
             </a:pPr>
-            <a:r>
-              <a:rPr lang="en-US" altLang="zh-CN" sz="2000" dirty="0">
-                <a:solidFill>
-                  <a:srgbClr val="000000"/>
-                </a:solidFill>
-                <a:latin typeface="等线" panose="02010600030101010101" pitchFamily="2" charset="-122"/>
-                <a:ea typeface="等线" panose="02010600030101010101" pitchFamily="2" charset="-122"/>
-              </a:rPr>
-              <a:t>Hosts build path in pkt headers</a:t>
-            </a:r>
+            <a:endParaRPr lang="en-US" altLang="zh-CN" sz="2000" dirty="0">
+              <a:solidFill>
+                <a:srgbClr val="000000"/>
+              </a:solidFill>
+              <a:latin typeface="等线" panose="02010600030101010101" pitchFamily="2" charset="-122"/>
+              <a:ea typeface="等线" panose="02010600030101010101" pitchFamily="2" charset="-122"/>
+            </a:endParaRPr>
           </a:p>
           <a:p>
             <a:pPr marL="285750" indent="-285750">
@@ -4841,15 +4830,42 @@
               <a:buChar char="•"/>
             </a:pPr>
             <a:r>
+              <a:rPr lang="en-US" altLang="zh-CN" sz="2000" dirty="0"/>
+              <a:t>OpenFlow 1.3</a:t>
+            </a:r>
+          </a:p>
+          <a:p>
+            <a:pPr marL="285750" indent="-285750">
+              <a:buFont typeface="Arial" panose="020B0604020202020204" pitchFamily="34" charset="0"/>
+              <a:buChar char="•"/>
+            </a:pPr>
+            <a:r>
+              <a:rPr lang="en-US" altLang="zh-CN" sz="2000" dirty="0"/>
+              <a:t>Repurpose </a:t>
+            </a:r>
+            <a:r>
+              <a:rPr lang="en-US" altLang="zh-CN" sz="2000" dirty="0" err="1"/>
+              <a:t>vlan</a:t>
+            </a:r>
+            <a:r>
+              <a:rPr lang="en-US" altLang="zh-CN" sz="2000" dirty="0"/>
+              <a:t> tag in </a:t>
+            </a:r>
+            <a:r>
               <a:rPr lang="en-US" altLang="zh-CN" sz="2000" dirty="0">
                 <a:solidFill>
                   <a:srgbClr val="000000"/>
                 </a:solidFill>
                 <a:latin typeface="等线" panose="02010600030101010101" pitchFamily="2" charset="-122"/>
-                <a:ea typeface="等线" panose="02010600030101010101" pitchFamily="2" charset="-122"/>
-              </a:rPr>
-              <a:t>Switches forward pkts following path in their headers</a:t>
-            </a:r>
+              </a:rPr>
+              <a:t>802.1Q headers to store path </a:t>
+            </a:r>
+          </a:p>
+          <a:p>
+            <a:pPr marL="285750" indent="-285750">
+              <a:buFont typeface="Arial" panose="020B0604020202020204" pitchFamily="34" charset="0"/>
+              <a:buChar char="•"/>
+            </a:pPr>
             <a:endParaRPr lang="zh-CN" altLang="en-US" sz="2000" dirty="0"/>
           </a:p>
         </p:txBody>
